--- a/public/fun/pack/pptx/newspro/카드뉴스프리미엄_19_감사·칭찬_레몬크림.pptx
+++ b/public/fun/pack/pptx/newspro/카드뉴스프리미엄_19_감사·칭찬_레몬크림.pptx
@@ -113,12 +113,12 @@
   <p:extLst>
     <p:ext uri="{521415D9-36F7-43E2-AB2F-B90AF26B5E84}">
       <p14:sectionLst xmlns:p14="http://schemas.microsoft.com/office/powerpoint/2010/main">
-        <p14:section name="시작" id="{0072B870-7091-4388-AD34-87FA03CE927F}">
+        <p14:section name="시작" id="{D96FA2F8-E3F5-4D84-AD91-6228AC0D3718}">
           <p14:sldIdLst>
             <p14:sldId id="256"/>
           </p14:sldIdLst>
         </p14:section>
-        <p14:section name="본문" id="{D02C13C0-FE40-4FF3-814A-4C7313744143}">
+        <p14:section name="본문" id="{2697CEFB-3E47-43DA-8F88-E3FDDEE59542}">
           <p14:sldIdLst>
             <p14:sldId id="257"/>
             <p14:sldId id="258"/>
@@ -127,7 +127,7 @@
             <p14:sldId id="261"/>
           </p14:sldIdLst>
         </p14:section>
-        <p14:section name="마무리" id="{EF46C6AC-731C-418F-9CD4-0C593FC38BC7}">
+        <p14:section name="마무리" id="{425C0287-0147-43F8-98F8-70E80CDEE2E7}">
           <p14:sldIdLst>
             <p14:sldId id="262"/>
           </p14:sldIdLst>
@@ -1491,7 +1491,7 @@
             </a:lvl1pPr>
           </a:lstStyle>
           <a:p>
-            <a:fld id="{BFBDF98E-7677-4564-A62D-C12411D97F92}" type="slidenum">
+            <a:fld id="{C1AA2180-BCBE-467D-AAF5-69C6D514184B}" type="slidenum">
               <a:rPr lang="en-US"/>
               <a:t>‹#›</a:t>
             </a:fld>
@@ -2214,7 +2214,7 @@
             </a:lvl1pPr>
           </a:lstStyle>
           <a:p>
-            <a:fld id="{491BA0CF-04ED-4B61-8AD5-50065FFD54D5}" type="slidenum">
+            <a:fld id="{4B582142-9DC7-4373-9ED0-1C93FFDF237B}" type="slidenum">
               <a:rPr lang="en-US"/>
               <a:t>‹#›</a:t>
             </a:fld>
@@ -2967,7 +2967,7 @@
             </a:lvl1pPr>
           </a:lstStyle>
           <a:p>
-            <a:fld id="{2C59A249-7D18-48BC-A936-40115C7E96AA}" type="slidenum">
+            <a:fld id="{02000381-BAFF-4E79-BA56-B0F7AD3A1309}" type="slidenum">
               <a:rPr lang="en-US"/>
               <a:t>‹#›</a:t>
             </a:fld>
@@ -4000,7 +4000,7 @@
           <a:bodyPr/>
           <a:lstStyle/>
           <a:p>
-            <a:fld id="{C6484181-DE05-41C5-BDB4-4DDB58B13250}" type="slidenum">
+            <a:fld id="{8FFBB0DF-2431-4240-8796-E9B8D66DA3A7}" type="slidenum">
               <a:rPr lang="en-US"/>
               <a:t>‹#›</a:t>
             </a:fld>
@@ -4166,7 +4166,7 @@
           <a:bodyPr/>
           <a:lstStyle/>
           <a:p>
-            <a:fld id="{61CF59FF-FB33-49F9-BC40-D362FD519D0E}" type="slidenum">
+            <a:fld id="{CAB094BB-76C8-45CA-8CFE-2D7DCB15AB13}" type="slidenum">
               <a:rPr lang="en-US"/>
               <a:t>‹#›</a:t>
             </a:fld>
@@ -4332,7 +4332,7 @@
           <a:bodyPr/>
           <a:lstStyle/>
           <a:p>
-            <a:fld id="{502BEBC6-681F-4E24-8505-0A8DDEB28245}" type="slidenum">
+            <a:fld id="{C9967DD3-29E3-4C23-A83B-9D72CFE03925}" type="slidenum">
               <a:rPr lang="en-US"/>
               <a:t>‹#›</a:t>
             </a:fld>
@@ -4498,7 +4498,7 @@
           <a:bodyPr/>
           <a:lstStyle/>
           <a:p>
-            <a:fld id="{841DD6CB-824C-4E35-AC9F-88D98BF9ACE6}" type="slidenum">
+            <a:fld id="{003CCD78-ABF2-4B9B-819E-0B79995223CF}" type="slidenum">
               <a:rPr lang="en-US"/>
               <a:t>‹#›</a:t>
             </a:fld>
@@ -4664,7 +4664,7 @@
           <a:bodyPr/>
           <a:lstStyle/>
           <a:p>
-            <a:fld id="{2D67EF8C-B924-47BA-BF4F-B4A2F52DAA54}" type="slidenum">
+            <a:fld id="{D75D9FE9-910D-4AAB-929D-80B87E07F12A}" type="slidenum">
               <a:rPr lang="en-US"/>
               <a:t>‹#›</a:t>
             </a:fld>
